--- a/Documents/Презентация ВКР Семенов Е.А. БПЦ 21-01.pptx
+++ b/Documents/Презентация ВКР Семенов Е.А. БПЦ 21-01.pptx
@@ -361,7 +361,7 @@
               <a:pPr>
                 <a:defRPr/>
               </a:pPr>
-              <a:t>6/17/2025</a:t>
+              <a:t>6/23/2025</a:t>
             </a:fld>
             <a:endParaRPr lang="en-US"/>
           </a:p>
@@ -595,7 +595,7 @@
               <a:pPr>
                 <a:defRPr/>
               </a:pPr>
-              <a:t>17.06.2025</a:t>
+              <a:t>23.06.2025</a:t>
             </a:fld>
             <a:endParaRPr lang="ru-RU"/>
           </a:p>
@@ -19641,8 +19641,8 @@
         </p:nvSpPr>
         <p:spPr bwMode="auto">
           <a:xfrm>
-            <a:off x="4191000" y="6215063"/>
-            <a:ext cx="2230438" cy="584200"/>
+            <a:off x="4191000" y="6337886"/>
+            <a:ext cx="2230438" cy="338554"/>
           </a:xfrm>
           <a:prstGeom prst="rect">
             <a:avLst/>
@@ -19812,7 +19812,7 @@
           <a:p>
             <a:pPr algn="ctr"/>
             <a:r>
-              <a:rPr lang="ru-RU" altLang="ru-RU" sz="800">
+              <a:rPr lang="ru-RU" altLang="ru-RU" sz="800" dirty="0">
                 <a:solidFill>
                   <a:srgbClr val="006CB5"/>
                 </a:solidFill>
@@ -19821,14 +19821,24 @@
               <a:t>© Сибирский государственный университет науки и технологий </a:t>
             </a:r>
             <a:r>
-              <a:rPr lang="ru-RU" altLang="ru-RU" sz="800">
+              <a:rPr lang="ru-RU" altLang="ru-RU" sz="800" dirty="0">
                 <a:solidFill>
                   <a:srgbClr val="006CB5"/>
                 </a:solidFill>
                 <a:latin typeface="Oswald Regular" panose="02000503000000000000" pitchFamily="2" charset="-52"/>
                 <a:cs typeface="Times New Roman" panose="02020603050405020304" pitchFamily="18" charset="0"/>
               </a:rPr>
-              <a:t>имени академика М. Ф. Решетнева, 2021</a:t>
+              <a:t>имени академика М. Ф. </a:t>
+            </a:r>
+            <a:r>
+              <a:rPr lang="ru-RU" altLang="ru-RU" sz="800">
+                <a:solidFill>
+                  <a:srgbClr val="006CB5"/>
+                </a:solidFill>
+                <a:latin typeface="Oswald Regular" panose="02000503000000000000" pitchFamily="2" charset="-52"/>
+                <a:cs typeface="Times New Roman" panose="02020603050405020304" pitchFamily="18" charset="0"/>
+              </a:rPr>
+              <a:t>Решетнева, 2025</a:t>
             </a:r>
             <a:endParaRPr lang="ru-RU" altLang="ru-RU" sz="800">
               <a:solidFill>
@@ -43934,7 +43944,7 @@
           <a:graphicData uri="http://schemas.openxmlformats.org/presentationml/2006/ole">
             <mc:AlternateContent xmlns:mc="http://schemas.openxmlformats.org/markup-compatibility/2006">
               <mc:Choice xmlns:v="urn:schemas-microsoft-com:vml" Requires="v">
-                <p:oleObj spid="_x0000_s1027" name="Visio" r:id="rId8" imgW="7210304" imgH="5419657" progId="Visio.Drawing.15">
+                <p:oleObj spid="_x0000_s1028" name="Visio" r:id="rId8" imgW="7210304" imgH="5419657" progId="Visio.Drawing.15">
                   <p:embed/>
                 </p:oleObj>
               </mc:Choice>
